--- a/Enterprise_AI_Playbook.pptx
+++ b/Enterprise_AI_Playbook.pptx
@@ -3013,7 +3013,7 @@
                 <a:ea typeface="Calibri" pitchFamily="34" charset="-122"/>
                 <a:cs typeface="Calibri" pitchFamily="34" charset="-120"/>
               </a:rPr>
-              <a:t>Spotify: capex ~€6M — smallest footprint on the list</a:t>
+              <a:t>Spotify: capex ~€6M (~$6.6M) — smallest footprint on the list</a:t>
             </a:r>
             <a:endParaRPr lang="en-US" sz="2600" dirty="0"/>
           </a:p>
